--- a/AI Job Posting Analytics & Insights.pptx
+++ b/AI Job Posting Analytics & Insights.pptx
@@ -2,14 +2,13 @@
 <file path=ppt/presentation.xml><?xml version="1.0" encoding="utf-8"?>
 <p:presentation xmlns:a="http://schemas.openxmlformats.org/drawingml/2006/main" xmlns:r="http://schemas.openxmlformats.org/officeDocument/2006/relationships" xmlns:p="http://schemas.openxmlformats.org/presentationml/2006/main" saveSubsetFonts="1">
   <p:sldMasterIdLst>
-    <p:sldMasterId id="2147483660" r:id="rId1"/>
+    <p:sldMasterId id="2147483716" r:id="rId1"/>
   </p:sldMasterIdLst>
   <p:sldIdLst>
     <p:sldId id="256" r:id="rId2"/>
     <p:sldId id="257" r:id="rId3"/>
     <p:sldId id="258" r:id="rId4"/>
     <p:sldId id="259" r:id="rId5"/>
-    <p:sldId id="260" r:id="rId6"/>
   </p:sldIdLst>
   <p:sldSz cx="12192000" cy="6858000"/>
   <p:notesSz cx="6858000" cy="9144000"/>
@@ -380,13 +379,18 @@
     </p:spTree>
     <p:extLst>
       <p:ext uri="{BB962C8B-B14F-4D97-AF65-F5344CB8AC3E}">
-        <p14:creationId xmlns:p14="http://schemas.microsoft.com/office/powerpoint/2010/main" val="1590752742"/>
+        <p14:creationId xmlns:p14="http://schemas.microsoft.com/office/powerpoint/2010/main" val="945997504"/>
       </p:ext>
     </p:extLst>
   </p:cSld>
   <p:clrMapOvr>
     <a:masterClrMapping/>
   </p:clrMapOvr>
+  <p:extLst>
+    <p:ext uri="{DCECCB84-F9BA-43D5-87BE-67443E8EF086}">
+      <p15:sldGuideLst xmlns:p15="http://schemas.microsoft.com/office/powerpoint/2012/main"/>
+    </p:ext>
+  </p:extLst>
 </p:sldLayout>
 </file>
 
@@ -676,7 +680,7 @@
     </p:spTree>
     <p:extLst>
       <p:ext uri="{BB962C8B-B14F-4D97-AF65-F5344CB8AC3E}">
-        <p14:creationId xmlns:p14="http://schemas.microsoft.com/office/powerpoint/2010/main" val="2174679415"/>
+        <p14:creationId xmlns:p14="http://schemas.microsoft.com/office/powerpoint/2010/main" val="3004578142"/>
       </p:ext>
     </p:extLst>
   </p:cSld>
@@ -985,7 +989,7 @@
     </p:spTree>
     <p:extLst>
       <p:ext uri="{BB962C8B-B14F-4D97-AF65-F5344CB8AC3E}">
-        <p14:creationId xmlns:p14="http://schemas.microsoft.com/office/powerpoint/2010/main" val="3549816020"/>
+        <p14:creationId xmlns:p14="http://schemas.microsoft.com/office/powerpoint/2010/main" val="906865355"/>
       </p:ext>
     </p:extLst>
   </p:cSld>
@@ -1278,7 +1282,7 @@
     </p:spTree>
     <p:extLst>
       <p:ext uri="{BB962C8B-B14F-4D97-AF65-F5344CB8AC3E}">
-        <p14:creationId xmlns:p14="http://schemas.microsoft.com/office/powerpoint/2010/main" val="4028506614"/>
+        <p14:creationId xmlns:p14="http://schemas.microsoft.com/office/powerpoint/2010/main" val="651486450"/>
       </p:ext>
     </p:extLst>
   </p:cSld>
@@ -1557,7 +1561,7 @@
     </p:spTree>
     <p:extLst>
       <p:ext uri="{BB962C8B-B14F-4D97-AF65-F5344CB8AC3E}">
-        <p14:creationId xmlns:p14="http://schemas.microsoft.com/office/powerpoint/2010/main" val="3785402451"/>
+        <p14:creationId xmlns:p14="http://schemas.microsoft.com/office/powerpoint/2010/main" val="1754654376"/>
       </p:ext>
     </p:extLst>
   </p:cSld>
@@ -1916,7 +1920,7 @@
     </p:spTree>
     <p:extLst>
       <p:ext uri="{BB962C8B-B14F-4D97-AF65-F5344CB8AC3E}">
-        <p14:creationId xmlns:p14="http://schemas.microsoft.com/office/powerpoint/2010/main" val="3814275912"/>
+        <p14:creationId xmlns:p14="http://schemas.microsoft.com/office/powerpoint/2010/main" val="2567801729"/>
       </p:ext>
     </p:extLst>
   </p:cSld>
@@ -2220,7 +2224,7 @@
     </p:spTree>
     <p:extLst>
       <p:ext uri="{BB962C8B-B14F-4D97-AF65-F5344CB8AC3E}">
-        <p14:creationId xmlns:p14="http://schemas.microsoft.com/office/powerpoint/2010/main" val="2727453472"/>
+        <p14:creationId xmlns:p14="http://schemas.microsoft.com/office/powerpoint/2010/main" val="2572951940"/>
       </p:ext>
     </p:extLst>
   </p:cSld>
@@ -2507,7 +2511,7 @@
     </p:spTree>
     <p:extLst>
       <p:ext uri="{BB962C8B-B14F-4D97-AF65-F5344CB8AC3E}">
-        <p14:creationId xmlns:p14="http://schemas.microsoft.com/office/powerpoint/2010/main" val="1151202161"/>
+        <p14:creationId xmlns:p14="http://schemas.microsoft.com/office/powerpoint/2010/main" val="1478445784"/>
       </p:ext>
     </p:extLst>
   </p:cSld>
@@ -2781,7 +2785,7 @@
     </p:spTree>
     <p:extLst>
       <p:ext uri="{BB962C8B-B14F-4D97-AF65-F5344CB8AC3E}">
-        <p14:creationId xmlns:p14="http://schemas.microsoft.com/office/powerpoint/2010/main" val="995063597"/>
+        <p14:creationId xmlns:p14="http://schemas.microsoft.com/office/powerpoint/2010/main" val="1094281744"/>
       </p:ext>
     </p:extLst>
   </p:cSld>
@@ -3051,7 +3055,7 @@
     </p:spTree>
     <p:extLst>
       <p:ext uri="{BB962C8B-B14F-4D97-AF65-F5344CB8AC3E}">
-        <p14:creationId xmlns:p14="http://schemas.microsoft.com/office/powerpoint/2010/main" val="1771412110"/>
+        <p14:creationId xmlns:p14="http://schemas.microsoft.com/office/powerpoint/2010/main" val="1523040573"/>
       </p:ext>
     </p:extLst>
   </p:cSld>
@@ -3313,7 +3317,7 @@
     </p:spTree>
     <p:extLst>
       <p:ext uri="{BB962C8B-B14F-4D97-AF65-F5344CB8AC3E}">
-        <p14:creationId xmlns:p14="http://schemas.microsoft.com/office/powerpoint/2010/main" val="2791482937"/>
+        <p14:creationId xmlns:p14="http://schemas.microsoft.com/office/powerpoint/2010/main" val="790646021"/>
       </p:ext>
     </p:extLst>
   </p:cSld>
@@ -3584,7 +3588,7 @@
     </p:spTree>
     <p:extLst>
       <p:ext uri="{BB962C8B-B14F-4D97-AF65-F5344CB8AC3E}">
-        <p14:creationId xmlns:p14="http://schemas.microsoft.com/office/powerpoint/2010/main" val="560579470"/>
+        <p14:creationId xmlns:p14="http://schemas.microsoft.com/office/powerpoint/2010/main" val="230962329"/>
       </p:ext>
     </p:extLst>
   </p:cSld>
@@ -3919,7 +3923,7 @@
     </p:spTree>
     <p:extLst>
       <p:ext uri="{BB962C8B-B14F-4D97-AF65-F5344CB8AC3E}">
-        <p14:creationId xmlns:p14="http://schemas.microsoft.com/office/powerpoint/2010/main" val="4073768632"/>
+        <p14:creationId xmlns:p14="http://schemas.microsoft.com/office/powerpoint/2010/main" val="1402842611"/>
       </p:ext>
     </p:extLst>
   </p:cSld>
@@ -4191,7 +4195,7 @@
     </p:spTree>
     <p:extLst>
       <p:ext uri="{BB962C8B-B14F-4D97-AF65-F5344CB8AC3E}">
-        <p14:creationId xmlns:p14="http://schemas.microsoft.com/office/powerpoint/2010/main" val="1330862841"/>
+        <p14:creationId xmlns:p14="http://schemas.microsoft.com/office/powerpoint/2010/main" val="3935008999"/>
       </p:ext>
     </p:extLst>
   </p:cSld>
@@ -4566,7 +4570,7 @@
     </p:spTree>
     <p:extLst>
       <p:ext uri="{BB962C8B-B14F-4D97-AF65-F5344CB8AC3E}">
-        <p14:creationId xmlns:p14="http://schemas.microsoft.com/office/powerpoint/2010/main" val="4167243905"/>
+        <p14:creationId xmlns:p14="http://schemas.microsoft.com/office/powerpoint/2010/main" val="1456115096"/>
       </p:ext>
     </p:extLst>
   </p:cSld>
@@ -5107,7 +5111,7 @@
     </p:spTree>
     <p:extLst>
       <p:ext uri="{BB962C8B-B14F-4D97-AF65-F5344CB8AC3E}">
-        <p14:creationId xmlns:p14="http://schemas.microsoft.com/office/powerpoint/2010/main" val="2000510211"/>
+        <p14:creationId xmlns:p14="http://schemas.microsoft.com/office/powerpoint/2010/main" val="2715010361"/>
       </p:ext>
     </p:extLst>
   </p:cSld>
@@ -5286,7 +5290,7 @@
     </p:spTree>
     <p:extLst>
       <p:ext uri="{BB962C8B-B14F-4D97-AF65-F5344CB8AC3E}">
-        <p14:creationId xmlns:p14="http://schemas.microsoft.com/office/powerpoint/2010/main" val="1898459990"/>
+        <p14:creationId xmlns:p14="http://schemas.microsoft.com/office/powerpoint/2010/main" val="1997176170"/>
       </p:ext>
     </p:extLst>
   </p:cSld>
@@ -5423,7 +5427,7 @@
     </p:spTree>
     <p:extLst>
       <p:ext uri="{BB962C8B-B14F-4D97-AF65-F5344CB8AC3E}">
-        <p14:creationId xmlns:p14="http://schemas.microsoft.com/office/powerpoint/2010/main" val="314911974"/>
+        <p14:creationId xmlns:p14="http://schemas.microsoft.com/office/powerpoint/2010/main" val="3156985435"/>
       </p:ext>
     </p:extLst>
   </p:cSld>
@@ -5740,7 +5744,7 @@
     </p:spTree>
     <p:extLst>
       <p:ext uri="{BB962C8B-B14F-4D97-AF65-F5344CB8AC3E}">
-        <p14:creationId xmlns:p14="http://schemas.microsoft.com/office/powerpoint/2010/main" val="1651944434"/>
+        <p14:creationId xmlns:p14="http://schemas.microsoft.com/office/powerpoint/2010/main" val="1587108248"/>
       </p:ext>
     </p:extLst>
   </p:cSld>
@@ -6054,7 +6058,7 @@
     </p:spTree>
     <p:extLst>
       <p:ext uri="{BB962C8B-B14F-4D97-AF65-F5344CB8AC3E}">
-        <p14:creationId xmlns:p14="http://schemas.microsoft.com/office/powerpoint/2010/main" val="4100931214"/>
+        <p14:creationId xmlns:p14="http://schemas.microsoft.com/office/powerpoint/2010/main" val="437671531"/>
       </p:ext>
     </p:extLst>
   </p:cSld>
@@ -6327,7 +6331,7 @@
     </p:spTree>
     <p:extLst>
       <p:ext uri="{BB962C8B-B14F-4D97-AF65-F5344CB8AC3E}">
-        <p14:creationId xmlns:p14="http://schemas.microsoft.com/office/powerpoint/2010/main" val="774772667"/>
+        <p14:creationId xmlns:p14="http://schemas.microsoft.com/office/powerpoint/2010/main" val="2848446336"/>
       </p:ext>
     </p:extLst>
   </p:cSld>
@@ -6636,7 +6640,7 @@
     </p:spTree>
     <p:extLst>
       <p:ext uri="{BB962C8B-B14F-4D97-AF65-F5344CB8AC3E}">
-        <p14:creationId xmlns:p14="http://schemas.microsoft.com/office/powerpoint/2010/main" val="691701298"/>
+        <p14:creationId xmlns:p14="http://schemas.microsoft.com/office/powerpoint/2010/main" val="2650902533"/>
       </p:ext>
     </p:extLst>
   </p:cSld>
@@ -6878,7 +6882,7 @@
     </p:spTree>
     <p:extLst>
       <p:ext uri="{BB962C8B-B14F-4D97-AF65-F5344CB8AC3E}">
-        <p14:creationId xmlns:p14="http://schemas.microsoft.com/office/powerpoint/2010/main" val="1850353947"/>
+        <p14:creationId xmlns:p14="http://schemas.microsoft.com/office/powerpoint/2010/main" val="1434155355"/>
       </p:ext>
     </p:extLst>
   </p:cSld>
@@ -7211,7 +7215,7 @@
     </p:spTree>
     <p:extLst>
       <p:ext uri="{BB962C8B-B14F-4D97-AF65-F5344CB8AC3E}">
-        <p14:creationId xmlns:p14="http://schemas.microsoft.com/office/powerpoint/2010/main" val="4270820436"/>
+        <p14:creationId xmlns:p14="http://schemas.microsoft.com/office/powerpoint/2010/main" val="2617806612"/>
       </p:ext>
     </p:extLst>
   </p:cSld>
@@ -7627,7 +7631,7 @@
     </p:spTree>
     <p:extLst>
       <p:ext uri="{BB962C8B-B14F-4D97-AF65-F5344CB8AC3E}">
-        <p14:creationId xmlns:p14="http://schemas.microsoft.com/office/powerpoint/2010/main" val="1104128788"/>
+        <p14:creationId xmlns:p14="http://schemas.microsoft.com/office/powerpoint/2010/main" val="972761054"/>
       </p:ext>
     </p:extLst>
   </p:cSld>
@@ -7956,7 +7960,7 @@
     </p:spTree>
     <p:extLst>
       <p:ext uri="{BB962C8B-B14F-4D97-AF65-F5344CB8AC3E}">
-        <p14:creationId xmlns:p14="http://schemas.microsoft.com/office/powerpoint/2010/main" val="2028679505"/>
+        <p14:creationId xmlns:p14="http://schemas.microsoft.com/office/powerpoint/2010/main" val="3993701301"/>
       </p:ext>
     </p:extLst>
   </p:cSld>
@@ -8297,7 +8301,7 @@
     </p:spTree>
     <p:extLst>
       <p:ext uri="{BB962C8B-B14F-4D97-AF65-F5344CB8AC3E}">
-        <p14:creationId xmlns:p14="http://schemas.microsoft.com/office/powerpoint/2010/main" val="1968530185"/>
+        <p14:creationId xmlns:p14="http://schemas.microsoft.com/office/powerpoint/2010/main" val="3911871217"/>
       </p:ext>
     </p:extLst>
   </p:cSld>
@@ -8570,39 +8574,39 @@
     </p:spTree>
     <p:extLst>
       <p:ext uri="{BB962C8B-B14F-4D97-AF65-F5344CB8AC3E}">
-        <p14:creationId xmlns:p14="http://schemas.microsoft.com/office/powerpoint/2010/main" val="2591013955"/>
+        <p14:creationId xmlns:p14="http://schemas.microsoft.com/office/powerpoint/2010/main" val="3578218262"/>
       </p:ext>
     </p:extLst>
   </p:cSld>
   <p:clrMap bg1="dk1" tx1="lt1" bg2="dk2" tx2="lt2" accent1="accent1" accent2="accent2" accent3="accent3" accent4="accent4" accent5="accent5" accent6="accent6" hlink="hlink" folHlink="folHlink"/>
   <p:sldLayoutIdLst>
-    <p:sldLayoutId id="2147483661" r:id="rId1"/>
-    <p:sldLayoutId id="2147483662" r:id="rId2"/>
-    <p:sldLayoutId id="2147483663" r:id="rId3"/>
-    <p:sldLayoutId id="2147483664" r:id="rId4"/>
-    <p:sldLayoutId id="2147483665" r:id="rId5"/>
-    <p:sldLayoutId id="2147483666" r:id="rId6"/>
-    <p:sldLayoutId id="2147483667" r:id="rId7"/>
-    <p:sldLayoutId id="2147483668" r:id="rId8"/>
-    <p:sldLayoutId id="2147483669" r:id="rId9"/>
-    <p:sldLayoutId id="2147483670" r:id="rId10"/>
-    <p:sldLayoutId id="2147483671" r:id="rId11"/>
-    <p:sldLayoutId id="2147483672" r:id="rId12"/>
-    <p:sldLayoutId id="2147483673" r:id="rId13"/>
-    <p:sldLayoutId id="2147483674" r:id="rId14"/>
-    <p:sldLayoutId id="2147483675" r:id="rId15"/>
-    <p:sldLayoutId id="2147483676" r:id="rId16"/>
-    <p:sldLayoutId id="2147483677" r:id="rId17"/>
-    <p:sldLayoutId id="2147483678" r:id="rId18"/>
-    <p:sldLayoutId id="2147483679" r:id="rId19"/>
-    <p:sldLayoutId id="2147483680" r:id="rId20"/>
-    <p:sldLayoutId id="2147483681" r:id="rId21"/>
-    <p:sldLayoutId id="2147483682" r:id="rId22"/>
-    <p:sldLayoutId id="2147483683" r:id="rId23"/>
-    <p:sldLayoutId id="2147483684" r:id="rId24"/>
-    <p:sldLayoutId id="2147483685" r:id="rId25"/>
-    <p:sldLayoutId id="2147483686" r:id="rId26"/>
-    <p:sldLayoutId id="2147483687" r:id="rId27"/>
+    <p:sldLayoutId id="2147483717" r:id="rId1"/>
+    <p:sldLayoutId id="2147483718" r:id="rId2"/>
+    <p:sldLayoutId id="2147483719" r:id="rId3"/>
+    <p:sldLayoutId id="2147483720" r:id="rId4"/>
+    <p:sldLayoutId id="2147483721" r:id="rId5"/>
+    <p:sldLayoutId id="2147483722" r:id="rId6"/>
+    <p:sldLayoutId id="2147483723" r:id="rId7"/>
+    <p:sldLayoutId id="2147483724" r:id="rId8"/>
+    <p:sldLayoutId id="2147483725" r:id="rId9"/>
+    <p:sldLayoutId id="2147483726" r:id="rId10"/>
+    <p:sldLayoutId id="2147483727" r:id="rId11"/>
+    <p:sldLayoutId id="2147483728" r:id="rId12"/>
+    <p:sldLayoutId id="2147483729" r:id="rId13"/>
+    <p:sldLayoutId id="2147483730" r:id="rId14"/>
+    <p:sldLayoutId id="2147483731" r:id="rId15"/>
+    <p:sldLayoutId id="2147483732" r:id="rId16"/>
+    <p:sldLayoutId id="2147483733" r:id="rId17"/>
+    <p:sldLayoutId id="2147483734" r:id="rId18"/>
+    <p:sldLayoutId id="2147483735" r:id="rId19"/>
+    <p:sldLayoutId id="2147483736" r:id="rId20"/>
+    <p:sldLayoutId id="2147483737" r:id="rId21"/>
+    <p:sldLayoutId id="2147483738" r:id="rId22"/>
+    <p:sldLayoutId id="2147483739" r:id="rId23"/>
+    <p:sldLayoutId id="2147483740" r:id="rId24"/>
+    <p:sldLayoutId id="2147483741" r:id="rId25"/>
+    <p:sldLayoutId id="2147483742" r:id="rId26"/>
+    <p:sldLayoutId id="2147483743" r:id="rId27"/>
   </p:sldLayoutIdLst>
   <p:txStyles>
     <p:titleStyle>
@@ -9113,7 +9117,7 @@
         </p:spPr>
         <p:txBody>
           <a:bodyPr>
-            <a:normAutofit fontScale="77500" lnSpcReduction="20000"/>
+            <a:normAutofit/>
           </a:bodyPr>
           <a:lstStyle/>
           <a:p>
@@ -9121,7 +9125,7 @@
               <a:buNone/>
             </a:pPr>
             <a:r>
-              <a:rPr lang="en-IN" sz="3600" b="1" dirty="0">
+              <a:rPr lang="en-IN" sz="2800" b="1" dirty="0">
                 <a:solidFill>
                   <a:schemeClr val="accent3"/>
                 </a:solidFill>
@@ -9132,9 +9136,10 @@
               <a:rPr lang="en-IN" sz="3600" dirty="0"/>
             </a:br>
             <a:r>
-              <a:rPr lang="en-IN" sz="3600" dirty="0"/>
+              <a:rPr lang="en-IN" sz="2000" dirty="0"/>
               <a:t>The Artificial Intelligence and Machine Learning industry has seen explosive growth over the past few years, creating a surge in specialized job roles — from Machine Learning Engineers and AI Architects to Autonomous Systems Engineers. However, this rapid expansion has created a fragmented and opaque job market where critical information is scattered across platforms, making informed decision-making difficult for all stakeholders.</a:t>
             </a:r>
+            <a:endParaRPr lang="en-IN" sz="3600" dirty="0"/>
           </a:p>
         </p:txBody>
       </p:sp>
@@ -9249,24 +9254,22 @@
             <p:ph idx="1"/>
           </p:nvPr>
         </p:nvSpPr>
-        <p:spPr/>
+        <p:spPr>
+          <a:xfrm>
+            <a:off x="838200" y="1330037"/>
+            <a:ext cx="9942409" cy="5027900"/>
+          </a:xfrm>
+        </p:spPr>
         <p:txBody>
           <a:bodyPr>
-            <a:normAutofit/>
+            <a:normAutofit lnSpcReduction="10000"/>
           </a:bodyPr>
           <a:lstStyle/>
           <a:p>
-            <a:pPr marL="0" indent="0">
-              <a:buNone/>
+            <a:pPr marL="342900" lvl="0" indent="-342900">
+              <a:buFont typeface="+mj-lt"/>
+              <a:buAutoNum type="arabicPeriod"/>
             </a:pPr>
-            <a:r>
-              <a:rPr lang="en-IN" sz="1800" b="1" dirty="0"/>
-              <a:t>Key Problems Identified:</a:t>
-            </a:r>
-            <a:endParaRPr lang="en-IN" sz="1800" dirty="0"/>
-          </a:p>
-          <a:p>
-            <a:pPr lvl="0"/>
             <a:r>
               <a:rPr lang="en-IN" sz="1800" b="1" dirty="0"/>
               <a:t>Lack of Salary Transparency</a:t>
@@ -9291,7 +9294,10 @@
             </a:r>
           </a:p>
           <a:p>
-            <a:pPr lvl="0"/>
+            <a:pPr marL="342900" lvl="0" indent="-342900">
+              <a:buFont typeface="+mj-lt"/>
+              <a:buAutoNum type="arabicPeriod"/>
+            </a:pPr>
             <a:r>
               <a:rPr lang="en-IN" sz="1800" b="1" dirty="0"/>
               <a:t>Fragmented Skill Demand Signals</a:t>
@@ -9316,6 +9322,39 @@
               <a:t>, Kubernetes, NLP) are mentioned inconsistently across job boards, making it hard for students/professionals to prioritize learning paths that align with market needs</a:t>
             </a:r>
           </a:p>
+          <a:p>
+            <a:pPr marL="342900" lvl="0" indent="-342900">
+              <a:buFont typeface="+mj-lt"/>
+              <a:buAutoNum type="arabicPeriod" startAt="3"/>
+            </a:pPr>
+            <a:r>
+              <a:rPr lang="en-IN" sz="1800" b="1" dirty="0"/>
+              <a:t>Unclear Remote Work Trends</a:t>
+            </a:r>
+            <a:r>
+              <a:rPr lang="en-IN" sz="1800" dirty="0"/>
+              <a:t> </a:t>
+            </a:r>
+          </a:p>
+          <a:p>
+            <a:pPr lvl="1"/>
+            <a:r>
+              <a:rPr lang="en-IN" sz="1800" dirty="0"/>
+              <a:t>Only ~33% of roles are fully remote, but this varies drastically by industry (e.g., Media/Consulting </a:t>
+            </a:r>
+            <a:r>
+              <a:rPr lang="en-IN" sz="1800" dirty="0" err="1"/>
+              <a:t>favor</a:t>
+            </a:r>
+            <a:r>
+              <a:rPr lang="en-IN" sz="1800" dirty="0"/>
+              <a:t> hybrid) — without data, professionals can't target industries matching their work-flexibility preferences</a:t>
+            </a:r>
+          </a:p>
+          <a:p>
+            <a:pPr lvl="1"/>
+            <a:endParaRPr lang="en-IN" sz="1800" dirty="0"/>
+          </a:p>
         </p:txBody>
       </p:sp>
       <p:sp>
@@ -9334,8 +9373,8 @@
         </p:nvSpPr>
         <p:spPr>
           <a:xfrm>
-            <a:off x="838200" y="500062"/>
-            <a:ext cx="10515600" cy="1325563"/>
+            <a:off x="838200" y="500063"/>
+            <a:ext cx="10515600" cy="829974"/>
           </a:xfrm>
           <a:prstGeom prst="rect">
             <a:avLst/>
@@ -9366,14 +9405,18 @@
           </a:lstStyle>
           <a:p>
             <a:r>
-              <a:rPr lang="en-IN" b="1" dirty="0">
-                <a:solidFill>
-                  <a:schemeClr val="accent1"/>
-                </a:solidFill>
-                <a:latin typeface="Arial Black" panose="020B0A04020102020204" pitchFamily="34" charset="0"/>
+              <a:rPr lang="en-IN" sz="2800" b="1" dirty="0">
+                <a:solidFill>
+                  <a:schemeClr val="accent3"/>
+                </a:solidFill>
               </a:rPr>
-              <a:t>Problem Statement</a:t>
-            </a:r>
+              <a:t>Key Problems Identified:</a:t>
+            </a:r>
+            <a:endParaRPr lang="en-IN" sz="2800" dirty="0">
+              <a:solidFill>
+                <a:schemeClr val="accent3"/>
+              </a:solidFill>
+            </a:endParaRPr>
           </a:p>
         </p:txBody>
       </p:sp>
@@ -9429,17 +9472,25 @@
             <p:ph idx="1"/>
           </p:nvPr>
         </p:nvSpPr>
-        <p:spPr/>
+        <p:spPr>
+          <a:xfrm>
+            <a:off x="865022" y="549130"/>
+            <a:ext cx="9942409" cy="5759739"/>
+          </a:xfrm>
+        </p:spPr>
         <p:txBody>
           <a:bodyPr>
             <a:normAutofit/>
           </a:bodyPr>
           <a:lstStyle/>
           <a:p>
-            <a:pPr lvl="0"/>
+            <a:pPr marL="342900" lvl="0" indent="-342900">
+              <a:buFont typeface="+mj-lt"/>
+              <a:buAutoNum type="arabicPeriod" startAt="4"/>
+            </a:pPr>
             <a:r>
               <a:rPr lang="en-IN" sz="1800" b="1" dirty="0"/>
-              <a:t>Unclear Remote Work Trends</a:t>
+              <a:t>Education-to-Opportunity Mismatch</a:t>
             </a:r>
             <a:r>
               <a:rPr lang="en-IN" sz="1800" dirty="0"/>
@@ -9450,22 +9501,21 @@
             <a:pPr lvl="1"/>
             <a:r>
               <a:rPr lang="en-IN" sz="1800" dirty="0"/>
-              <a:t>Only ~33% of roles are fully remote, but this varies drastically by industry (e.g., Media/Consulting </a:t>
-            </a:r>
-            <a:r>
-              <a:rPr lang="en-IN" sz="1800" dirty="0" err="1"/>
-              <a:t>favor</a:t>
-            </a:r>
-            <a:r>
-              <a:rPr lang="en-IN" sz="1800" dirty="0"/>
-              <a:t> hybrid) — without data, professionals can't target industries matching their work-flexibility preferences</a:t>
-            </a:r>
-          </a:p>
-          <a:p>
-            <a:pPr lvl="0"/>
+              <a:t>Nearly equal demand across Bachelor's, Master's, Associate, and PhD-level roles (~25% each) raises the question of whether higher education levels are translating into proportionally better outcomes (salary, seniority) — this isn't visible without analysis</a:t>
+            </a:r>
+          </a:p>
+          <a:p>
+            <a:pPr lvl="1"/>
+            <a:endParaRPr lang="en-IN" sz="1800" dirty="0"/>
+          </a:p>
+          <a:p>
+            <a:pPr marL="342900" lvl="0" indent="-342900">
+              <a:buFont typeface="+mj-lt"/>
+              <a:buAutoNum type="arabicPeriod" startAt="5"/>
+            </a:pPr>
             <a:r>
               <a:rPr lang="en-IN" sz="1800" b="1" dirty="0"/>
-              <a:t>Education-to-Opportunity Mismatch</a:t>
+              <a:t>Inconsistent Regional &amp; Industry Hiring Patterns</a:t>
             </a:r>
             <a:r>
               <a:rPr lang="en-IN" sz="1800" dirty="0"/>
@@ -9476,67 +9526,53 @@
             <a:pPr lvl="1"/>
             <a:r>
               <a:rPr lang="en-IN" sz="1800" dirty="0"/>
-              <a:t>Nearly equal demand across Bachelor's, Master's, Associate, and PhD-level roles (~25% each) raises the question of whether higher education levels are translating into proportionally better outcomes (salary, seniority) — this isn't visible without analysis</a:t>
-            </a:r>
-          </a:p>
-        </p:txBody>
-      </p:sp>
-      <p:sp>
-        <p:nvSpPr>
-          <p:cNvPr id="6" name="Title 1">
-            <a:extLst>
-              <a:ext uri="{FF2B5EF4-FFF2-40B4-BE49-F238E27FC236}">
-                <a16:creationId xmlns:a16="http://schemas.microsoft.com/office/drawing/2014/main" id="{9D1040CC-F572-1188-390E-63F24B62540D}"/>
-              </a:ext>
-            </a:extLst>
-          </p:cNvPr>
-          <p:cNvSpPr txBox="1">
-            <a:spLocks/>
-          </p:cNvSpPr>
-          <p:nvPr/>
-        </p:nvSpPr>
-        <p:spPr>
-          <a:xfrm>
-            <a:off x="838200" y="500062"/>
-            <a:ext cx="10515600" cy="1325563"/>
-          </a:xfrm>
-          <a:prstGeom prst="rect">
-            <a:avLst/>
-          </a:prstGeom>
-        </p:spPr>
-        <p:txBody>
-          <a:bodyPr vert="horz" lIns="91440" tIns="45720" rIns="91440" bIns="45720" rtlCol="0" anchor="ctr">
-            <a:normAutofit/>
-          </a:bodyPr>
-          <a:lstStyle>
-            <a:lvl1pPr algn="l" defTabSz="914400" rtl="0" eaLnBrk="1" latinLnBrk="0" hangingPunct="1">
-              <a:lnSpc>
-                <a:spcPct val="90000"/>
-              </a:lnSpc>
-              <a:spcBef>
-                <a:spcPct val="0"/>
-              </a:spcBef>
-              <a:buNone/>
-              <a:defRPr sz="4400" kern="1200">
-                <a:solidFill>
-                  <a:schemeClr val="tx1"/>
-                </a:solidFill>
-                <a:latin typeface="+mj-lt"/>
-                <a:ea typeface="+mj-ea"/>
-                <a:cs typeface="+mj-cs"/>
-              </a:defRPr>
-            </a:lvl1pPr>
-          </a:lstStyle>
-          <a:p>
-            <a:r>
-              <a:rPr lang="en-IN" b="1" dirty="0">
-                <a:solidFill>
-                  <a:schemeClr val="accent1"/>
-                </a:solidFill>
-                <a:latin typeface="Arial Black" panose="020B0A04020102020204" pitchFamily="34" charset="0"/>
-              </a:rPr>
-              <a:t>Problem Statement</a:t>
-            </a:r>
+              <a:t>Hiring is concentrated in specific countries (Germany, France, Denmark, Canada, Austria) and industries (Retail, Technology leading) — but the underlying drivers (cost of </a:t>
+            </a:r>
+            <a:r>
+              <a:rPr lang="en-IN" sz="1800" dirty="0" err="1"/>
+              <a:t>labor</a:t>
+            </a:r>
+            <a:r>
+              <a:rPr lang="en-IN" sz="1800" dirty="0"/>
+              <a:t>, remote policies, industry maturity) are not well understood by outside observers</a:t>
+            </a:r>
+          </a:p>
+          <a:p>
+            <a:pPr lvl="1"/>
+            <a:endParaRPr lang="en-IN" sz="1800" dirty="0"/>
+          </a:p>
+          <a:p>
+            <a:pPr marL="342900" lvl="0" indent="-342900">
+              <a:buFont typeface="+mj-lt"/>
+              <a:buAutoNum type="arabicPeriod" startAt="6"/>
+            </a:pPr>
+            <a:r>
+              <a:rPr lang="en-IN" sz="1800" b="1" dirty="0"/>
+              <a:t>No Centralized Decision-Support Tool</a:t>
+            </a:r>
+            <a:r>
+              <a:rPr lang="en-IN" sz="1800" dirty="0"/>
+              <a:t> </a:t>
+            </a:r>
+          </a:p>
+          <a:p>
+            <a:pPr lvl="1"/>
+            <a:r>
+              <a:rPr lang="en-IN" sz="1800" dirty="0"/>
+              <a:t>Job seekers, HR teams, and career </a:t>
+            </a:r>
+            <a:r>
+              <a:rPr lang="en-IN" sz="1800" dirty="0" err="1"/>
+              <a:t>counselors</a:t>
+            </a:r>
+            <a:r>
+              <a:rPr lang="en-IN" sz="1800" dirty="0"/>
+              <a:t> currently rely on manual research across multiple job boards and salary aggregators — a slow, incomplete, and bias-prone process with no single source of truth</a:t>
+            </a:r>
+          </a:p>
+          <a:p>
+            <a:pPr lvl="1"/>
+            <a:endParaRPr lang="en-IN" sz="1800" dirty="0"/>
           </a:p>
         </p:txBody>
       </p:sp>
@@ -9544,177 +9580,6 @@
     <p:extLst>
       <p:ext uri="{BB962C8B-B14F-4D97-AF65-F5344CB8AC3E}">
         <p14:creationId xmlns:p14="http://schemas.microsoft.com/office/powerpoint/2010/main" val="1622314751"/>
-      </p:ext>
-    </p:extLst>
-  </p:cSld>
-  <p:clrMapOvr>
-    <a:masterClrMapping/>
-  </p:clrMapOvr>
-</p:sld>
-</file>
-
-<file path=ppt/slides/slide5.xml><?xml version="1.0" encoding="utf-8"?>
-<p:sld xmlns:a="http://schemas.openxmlformats.org/drawingml/2006/main" xmlns:r="http://schemas.openxmlformats.org/officeDocument/2006/relationships" xmlns:p="http://schemas.openxmlformats.org/presentationml/2006/main">
-  <p:cSld>
-    <p:spTree>
-      <p:nvGrpSpPr>
-        <p:cNvPr id="1" name="">
-          <a:extLst>
-            <a:ext uri="{FF2B5EF4-FFF2-40B4-BE49-F238E27FC236}">
-              <a16:creationId xmlns:a16="http://schemas.microsoft.com/office/drawing/2014/main" id="{A25CB192-83EE-DF92-ABFF-926452B6DEA0}"/>
-            </a:ext>
-          </a:extLst>
-        </p:cNvPr>
-        <p:cNvGrpSpPr/>
-        <p:nvPr/>
-      </p:nvGrpSpPr>
-      <p:grpSpPr>
-        <a:xfrm>
-          <a:off x="0" y="0"/>
-          <a:ext cx="0" cy="0"/>
-          <a:chOff x="0" y="0"/>
-          <a:chExt cx="0" cy="0"/>
-        </a:xfrm>
-      </p:grpSpPr>
-      <p:sp>
-        <p:nvSpPr>
-          <p:cNvPr id="3" name="Content Placeholder 2">
-            <a:extLst>
-              <a:ext uri="{FF2B5EF4-FFF2-40B4-BE49-F238E27FC236}">
-                <a16:creationId xmlns:a16="http://schemas.microsoft.com/office/drawing/2014/main" id="{1D42A66C-AE30-540C-61D8-0D3FAFD13247}"/>
-              </a:ext>
-            </a:extLst>
-          </p:cNvPr>
-          <p:cNvSpPr>
-            <a:spLocks noGrp="1"/>
-          </p:cNvSpPr>
-          <p:nvPr>
-            <p:ph idx="1"/>
-          </p:nvPr>
-        </p:nvSpPr>
-        <p:spPr/>
-        <p:txBody>
-          <a:bodyPr>
-            <a:normAutofit/>
-          </a:bodyPr>
-          <a:lstStyle/>
-          <a:p>
-            <a:pPr lvl="0"/>
-            <a:r>
-              <a:rPr lang="en-IN" sz="1800" b="1" dirty="0"/>
-              <a:t>Inconsistent Regional &amp; Industry Hiring Patterns</a:t>
-            </a:r>
-            <a:r>
-              <a:rPr lang="en-IN" sz="1800" dirty="0"/>
-              <a:t> </a:t>
-            </a:r>
-          </a:p>
-          <a:p>
-            <a:pPr lvl="1"/>
-            <a:r>
-              <a:rPr lang="en-IN" sz="1800" dirty="0"/>
-              <a:t>Hiring is concentrated in specific countries (Germany, France, Denmark, Canada, Austria) and industries (Retail, Technology leading) — but the underlying drivers (cost of </a:t>
-            </a:r>
-            <a:r>
-              <a:rPr lang="en-IN" sz="1800" dirty="0" err="1"/>
-              <a:t>labor</a:t>
-            </a:r>
-            <a:r>
-              <a:rPr lang="en-IN" sz="1800" dirty="0"/>
-              <a:t>, remote policies, industry maturity) are not well understood by outside observers</a:t>
-            </a:r>
-          </a:p>
-          <a:p>
-            <a:pPr lvl="0"/>
-            <a:r>
-              <a:rPr lang="en-IN" sz="1800" b="1" dirty="0"/>
-              <a:t>No Centralized Decision-Support Tool</a:t>
-            </a:r>
-            <a:r>
-              <a:rPr lang="en-IN" sz="1800" dirty="0"/>
-              <a:t> </a:t>
-            </a:r>
-          </a:p>
-          <a:p>
-            <a:pPr lvl="1"/>
-            <a:r>
-              <a:rPr lang="en-IN" sz="1800" dirty="0"/>
-              <a:t>Job seekers, HR teams, and career </a:t>
-            </a:r>
-            <a:r>
-              <a:rPr lang="en-IN" sz="1800" dirty="0" err="1"/>
-              <a:t>counselors</a:t>
-            </a:r>
-            <a:r>
-              <a:rPr lang="en-IN" sz="1800" dirty="0"/>
-              <a:t> currently rely on manual research across multiple job boards and salary aggregators — a slow, incomplete, and bias-prone process with no single source of truth</a:t>
-            </a:r>
-          </a:p>
-        </p:txBody>
-      </p:sp>
-      <p:sp>
-        <p:nvSpPr>
-          <p:cNvPr id="6" name="Title 1">
-            <a:extLst>
-              <a:ext uri="{FF2B5EF4-FFF2-40B4-BE49-F238E27FC236}">
-                <a16:creationId xmlns:a16="http://schemas.microsoft.com/office/drawing/2014/main" id="{E40703CA-934F-717E-4BBA-2B6666B0F920}"/>
-              </a:ext>
-            </a:extLst>
-          </p:cNvPr>
-          <p:cNvSpPr txBox="1">
-            <a:spLocks/>
-          </p:cNvSpPr>
-          <p:nvPr/>
-        </p:nvSpPr>
-        <p:spPr>
-          <a:xfrm>
-            <a:off x="838200" y="500062"/>
-            <a:ext cx="10515600" cy="1325563"/>
-          </a:xfrm>
-          <a:prstGeom prst="rect">
-            <a:avLst/>
-          </a:prstGeom>
-        </p:spPr>
-        <p:txBody>
-          <a:bodyPr vert="horz" lIns="91440" tIns="45720" rIns="91440" bIns="45720" rtlCol="0" anchor="ctr">
-            <a:normAutofit/>
-          </a:bodyPr>
-          <a:lstStyle>
-            <a:lvl1pPr algn="l" defTabSz="914400" rtl="0" eaLnBrk="1" latinLnBrk="0" hangingPunct="1">
-              <a:lnSpc>
-                <a:spcPct val="90000"/>
-              </a:lnSpc>
-              <a:spcBef>
-                <a:spcPct val="0"/>
-              </a:spcBef>
-              <a:buNone/>
-              <a:defRPr sz="4400" kern="1200">
-                <a:solidFill>
-                  <a:schemeClr val="tx1"/>
-                </a:solidFill>
-                <a:latin typeface="+mj-lt"/>
-                <a:ea typeface="+mj-ea"/>
-                <a:cs typeface="+mj-cs"/>
-              </a:defRPr>
-            </a:lvl1pPr>
-          </a:lstStyle>
-          <a:p>
-            <a:r>
-              <a:rPr lang="en-IN" b="1" dirty="0">
-                <a:solidFill>
-                  <a:schemeClr val="accent1"/>
-                </a:solidFill>
-                <a:latin typeface="Arial Black" panose="020B0A04020102020204" pitchFamily="34" charset="0"/>
-              </a:rPr>
-              <a:t>Problem Statement</a:t>
-            </a:r>
-          </a:p>
-        </p:txBody>
-      </p:sp>
-    </p:spTree>
-    <p:extLst>
-      <p:ext uri="{BB962C8B-B14F-4D97-AF65-F5344CB8AC3E}">
-        <p14:creationId xmlns:p14="http://schemas.microsoft.com/office/powerpoint/2010/main" val="3024697414"/>
       </p:ext>
     </p:extLst>
   </p:cSld>

--- a/AI Job Posting Analytics & Insights.pptx
+++ b/AI Job Posting Analytics & Insights.pptx
@@ -9057,8 +9057,22 @@
           <a:lstStyle/>
           <a:p>
             <a:r>
-              <a:rPr lang="en-IN" sz="1800" b="1" dirty="0"/>
+              <a:rPr lang="en-IN" sz="2000" b="1" dirty="0">
+                <a:solidFill>
+                  <a:schemeClr val="accent4"/>
+                </a:solidFill>
+              </a:rPr>
               <a:t>Gajera Akshit </a:t>
+            </a:r>
+          </a:p>
+          <a:p>
+            <a:r>
+              <a:rPr lang="en-IN" sz="1800" b="1" dirty="0">
+                <a:solidFill>
+                  <a:schemeClr val="accent4"/>
+                </a:solidFill>
+              </a:rPr>
+              <a:t>AF05148719</a:t>
             </a:r>
           </a:p>
         </p:txBody>
